--- a/m8/diapositivos/sessao-07-m8-f08.pptx
+++ b/m8/diapositivos/sessao-07-m8-f08.pptx
@@ -2590,7 +2590,7 @@
               <a:buNone/>
             </a:pPr>
             <a:r>
-              <a:rPr lang="en-US" sz="2300" dirty="0">
+              <a:rPr lang="en-US" sz="2300" b="1" dirty="0">
                 <a:solidFill>
                   <a:srgbClr val="F2F0EA"/>
                 </a:solidFill>
@@ -2598,7 +2598,24 @@
                 <a:ea typeface="Georgia" pitchFamily="34" charset="-122"/>
                 <a:cs typeface="Georgia" pitchFamily="34" charset="-120"/>
               </a:rPr>
-              <a:t>Maria Judite de Carvalho (Lisboa, 1921–1998) escreveu sobretudo narrativas breves, numa escrita contida, que prefere a sugestão à explicação. Os títulos dos seus contos nomeiam muitas vezes as protagonistas, como «George». Recebeu duas vezes o Grande Prémio de Conto Camilo Castelo Branco (1961 e 1995). O conto tem direitos de autor e não está transcrito aqui: lê-se no manual.</a:t>
+              <a:t>Maria Judite de Carvalho</a:t>
+            </a:r>
+            <a:pPr indent="0" marL="0">
+              <a:lnSpc>
+                <a:spcPct val="120000"/>
+              </a:lnSpc>
+              <a:buNone/>
+            </a:pPr>
+            <a:r>
+              <a:rPr lang="en-US" sz="2300" dirty="0">
+                <a:solidFill>
+                  <a:srgbClr val="F2F0EA"/>
+                </a:solidFill>
+                <a:latin typeface="Georgia" pitchFamily="34" charset="0"/>
+                <a:ea typeface="Georgia" pitchFamily="34" charset="-122"/>
+                <a:cs typeface="Georgia" pitchFamily="34" charset="-120"/>
+              </a:rPr>
+              <a:t> (Lisboa, 1921–1998) escreveu sobretudo narrativas breves, numa escrita contida, que prefere a sugestão à explicação. Os títulos dos seus contos nomeiam muitas vezes as protagonistas, como «George». Recebeu duas vezes o Grande Prémio de Conto Camilo Castelo Branco (1961 e 1995). O conto tem direitos de autor e não está transcrito aqui: lê-se no manual.</a:t>
             </a:r>
             <a:endParaRPr lang="en-US" sz="2300" dirty="0"/>
           </a:p>
@@ -3005,7 +3022,41 @@
                 <a:ea typeface="Arial" pitchFamily="34" charset="-122"/>
                 <a:cs typeface="Arial" pitchFamily="34" charset="-120"/>
               </a:rPr>
-              <a:t>Maria Judite de Carvalho (Lisboa, 1921–1998) escreveu sobretudo narrativas breves; «George», do livro Seta Despedida (1995), lê-se no manual, com esta lição por guião.</a:t>
+              <a:t>Maria Judite de Carvalho (Lisboa, 1921–1998) escreveu sobretudo narrativas breves; «George», do livro </a:t>
+            </a:r>
+            <a:pPr indent="0" marL="0">
+              <a:lnSpc>
+                <a:spcPct val="105000"/>
+              </a:lnSpc>
+              <a:buNone/>
+            </a:pPr>
+            <a:r>
+              <a:rPr lang="en-US" sz="2200" i="1" dirty="0">
+                <a:solidFill>
+                  <a:srgbClr val="F2F0EA"/>
+                </a:solidFill>
+                <a:latin typeface="Arial" pitchFamily="34" charset="0"/>
+                <a:ea typeface="Arial" pitchFamily="34" charset="-122"/>
+                <a:cs typeface="Arial" pitchFamily="34" charset="-120"/>
+              </a:rPr>
+              <a:t>Seta Despedida</a:t>
+            </a:r>
+            <a:pPr indent="0" marL="0">
+              <a:lnSpc>
+                <a:spcPct val="105000"/>
+              </a:lnSpc>
+              <a:buNone/>
+            </a:pPr>
+            <a:r>
+              <a:rPr lang="en-US" sz="2200" dirty="0">
+                <a:solidFill>
+                  <a:srgbClr val="F2F0EA"/>
+                </a:solidFill>
+                <a:latin typeface="Arial" pitchFamily="34" charset="0"/>
+                <a:ea typeface="Arial" pitchFamily="34" charset="-122"/>
+                <a:cs typeface="Arial" pitchFamily="34" charset="-120"/>
+              </a:rPr>
+              <a:t> (1995), lê-se no manual, com esta lição por guião.</a:t>
             </a:r>
             <a:endParaRPr lang="en-US" sz="2200" dirty="0"/>
           </a:p>
@@ -4448,13 +4499,10 @@
               <a:lnSpc>
                 <a:spcPct val="120000"/>
               </a:lnSpc>
-              <a:spcAft>
-                <a:spcPts val="1000"/>
-              </a:spcAft>
-              <a:buNone/>
-            </a:pPr>
-            <a:r>
-              <a:rPr lang="en-US" sz="2300" dirty="0">
+              <a:buNone/>
+            </a:pPr>
+            <a:r>
+              <a:rPr lang="en-US" sz="2300" b="1" dirty="0">
                 <a:solidFill>
                   <a:srgbClr val="F2F0EA"/>
                 </a:solidFill>
@@ -4462,18 +4510,12 @@
                 <a:ea typeface="Georgia" pitchFamily="34" charset="-122"/>
                 <a:cs typeface="Georgia" pitchFamily="34" charset="-120"/>
               </a:rPr>
-              <a:t>Unidade de ação: uma só linha de acontecimentos.</a:t>
-            </a:r>
-            <a:endParaRPr lang="en-US" sz="2300" dirty="0"/>
-          </a:p>
-          <a:p>
+              <a:t>Unidade de ação</a:t>
+            </a:r>
             <a:pPr indent="0" marL="0">
               <a:lnSpc>
                 <a:spcPct val="120000"/>
               </a:lnSpc>
-              <a:spcAft>
-                <a:spcPts val="1000"/>
-              </a:spcAft>
               <a:buNone/>
             </a:pPr>
             <a:r>
@@ -4485,22 +4527,16 @@
                 <a:ea typeface="Georgia" pitchFamily="34" charset="-122"/>
                 <a:cs typeface="Georgia" pitchFamily="34" charset="-120"/>
               </a:rPr>
-              <a:t>Concentração de tempo e de espaço: pouco tempo, poucos lugares.</a:t>
-            </a:r>
-            <a:endParaRPr lang="en-US" sz="2300" dirty="0"/>
-          </a:p>
-          <a:p>
+              <a:t>: uma só linha de acontecimentos. </a:t>
+            </a:r>
             <a:pPr indent="0" marL="0">
               <a:lnSpc>
                 <a:spcPct val="120000"/>
               </a:lnSpc>
-              <a:spcAft>
-                <a:spcPts val="1000"/>
-              </a:spcAft>
-              <a:buNone/>
-            </a:pPr>
-            <a:r>
-              <a:rPr lang="en-US" sz="2300" dirty="0">
+              <a:buNone/>
+            </a:pPr>
+            <a:r>
+              <a:rPr lang="en-US" sz="2300" b="1" dirty="0">
                 <a:solidFill>
                   <a:srgbClr val="F2F0EA"/>
                 </a:solidFill>
@@ -4508,18 +4544,12 @@
                 <a:ea typeface="Georgia" pitchFamily="34" charset="-122"/>
                 <a:cs typeface="Georgia" pitchFamily="34" charset="-120"/>
               </a:rPr>
-              <a:t>Discurso direto: as palavras da personagem, com travessão ou aspas.</a:t>
-            </a:r>
-            <a:endParaRPr lang="en-US" sz="2300" dirty="0"/>
-          </a:p>
-          <a:p>
+              <a:t>Concentração de tempo e de espaço</a:t>
+            </a:r>
             <a:pPr indent="0" marL="0">
               <a:lnSpc>
                 <a:spcPct val="120000"/>
               </a:lnSpc>
-              <a:spcAft>
-                <a:spcPts val="1000"/>
-              </a:spcAft>
               <a:buNone/>
             </a:pPr>
             <a:r>
@@ -4531,7 +4561,75 @@
                 <a:ea typeface="Georgia" pitchFamily="34" charset="-122"/>
                 <a:cs typeface="Georgia" pitchFamily="34" charset="-120"/>
               </a:rPr>
-              <a:t>Discurso indireto: o narrador conta o que foi dito. No conto, a protagonista tem três nomes, um para cada idade: Gi, George, Georgina.</a:t>
+              <a:t>: pouco tempo, poucos lugares. </a:t>
+            </a:r>
+            <a:pPr indent="0" marL="0">
+              <a:lnSpc>
+                <a:spcPct val="120000"/>
+              </a:lnSpc>
+              <a:buNone/>
+            </a:pPr>
+            <a:r>
+              <a:rPr lang="en-US" sz="2300" b="1" dirty="0">
+                <a:solidFill>
+                  <a:srgbClr val="F2F0EA"/>
+                </a:solidFill>
+                <a:latin typeface="Georgia" pitchFamily="34" charset="0"/>
+                <a:ea typeface="Georgia" pitchFamily="34" charset="-122"/>
+                <a:cs typeface="Georgia" pitchFamily="34" charset="-120"/>
+              </a:rPr>
+              <a:t>Discurso direto</a:t>
+            </a:r>
+            <a:pPr indent="0" marL="0">
+              <a:lnSpc>
+                <a:spcPct val="120000"/>
+              </a:lnSpc>
+              <a:buNone/>
+            </a:pPr>
+            <a:r>
+              <a:rPr lang="en-US" sz="2300" dirty="0">
+                <a:solidFill>
+                  <a:srgbClr val="F2F0EA"/>
+                </a:solidFill>
+                <a:latin typeface="Georgia" pitchFamily="34" charset="0"/>
+                <a:ea typeface="Georgia" pitchFamily="34" charset="-122"/>
+                <a:cs typeface="Georgia" pitchFamily="34" charset="-120"/>
+              </a:rPr>
+              <a:t>: as palavras da personagem, com travessão ou aspas. </a:t>
+            </a:r>
+            <a:pPr indent="0" marL="0">
+              <a:lnSpc>
+                <a:spcPct val="120000"/>
+              </a:lnSpc>
+              <a:buNone/>
+            </a:pPr>
+            <a:r>
+              <a:rPr lang="en-US" sz="2300" b="1" dirty="0">
+                <a:solidFill>
+                  <a:srgbClr val="F2F0EA"/>
+                </a:solidFill>
+                <a:latin typeface="Georgia" pitchFamily="34" charset="0"/>
+                <a:ea typeface="Georgia" pitchFamily="34" charset="-122"/>
+                <a:cs typeface="Georgia" pitchFamily="34" charset="-120"/>
+              </a:rPr>
+              <a:t>Discurso indireto</a:t>
+            </a:r>
+            <a:pPr indent="0" marL="0">
+              <a:lnSpc>
+                <a:spcPct val="120000"/>
+              </a:lnSpc>
+              <a:buNone/>
+            </a:pPr>
+            <a:r>
+              <a:rPr lang="en-US" sz="2300" dirty="0">
+                <a:solidFill>
+                  <a:srgbClr val="F2F0EA"/>
+                </a:solidFill>
+                <a:latin typeface="Georgia" pitchFamily="34" charset="0"/>
+                <a:ea typeface="Georgia" pitchFamily="34" charset="-122"/>
+                <a:cs typeface="Georgia" pitchFamily="34" charset="-120"/>
+              </a:rPr>
+              <a:t>: o narrador conta o que foi dito. No conto, a protagonista tem três nomes, um para cada idade: Gi, George, Georgina.</a:t>
             </a:r>
             <a:endParaRPr lang="en-US" sz="2300" dirty="0"/>
           </a:p>
